--- a/en/slides/23-Computer_Architecture-Verm1_On_The_Cartridge_Store.pptx
+++ b/en/slides/23-Computer_Architecture-Verm1_On_The_Cartridge_Store.pptx
@@ -119,7 +119,7 @@
   <p:extLst>
     <p:ext uri="{521415D9-36F7-43E2-AB2F-B90AF26B5E84}">
       <p14:sectionLst xmlns:p14="http://schemas.microsoft.com/office/powerpoint/2010/main">
-        <p14:section name="Opening" id="{0566a561-95ea-cb0b-7daf-1b2f3a398c18}">
+        <p14:section name="Opening" id="{b2678c1f-d886-6e4d-7f26-fab06b74aaf7}">
           <p14:sldIdLst>
             <p14:sldId id="256"/>
             <p14:sldId id="257"/>
@@ -128,14 +128,14 @@
             <p14:sldId id="260"/>
           </p14:sldIdLst>
         </p14:section>
-        <p14:section name="Step 2: an identity" id="{511f1837-adb3-b8b5-ead3-03f43a4ee32d}">
+        <p14:section name="Step 2: an identity" id="{cf136bbe-4176-412d-06db-6f64309fba8a}">
           <p14:sldIdLst>
             <p14:sldId id="261"/>
             <p14:sldId id="262"/>
             <p14:sldId id="263"/>
           </p14:sldIdLst>
         </p14:section>
-        <p14:section name="Step 5: publication" id="{6135506d-d85c-1bb2-53e7-9c1db9e66b28}">
+        <p14:section name="Step 5: publication" id="{de144b04-58d6-1a87-7086-6c8e2815fdc5}">
           <p14:sldIdLst>
             <p14:sldId id="264"/>
             <p14:sldId id="265"/>
@@ -2687,7 +2687,63 @@
       </p:sp>
       <p:sp>
         <p:nvSpPr>
-          <p:cNvPr id="13" name="Shape 11"/>
+          <p:cNvPr id="13" name="Text 11"/>
+          <p:cNvSpPr txBox="1"/>
+          <p:nvPr/>
+        </p:nvSpPr>
+        <p:spPr>
+          <a:xfrm>
+            <a:off x="4693615" y="566928"/>
+            <a:ext cx="6949440" cy="640080"/>
+          </a:xfrm>
+          <a:prstGeom prst="rect">
+            <a:avLst/>
+          </a:prstGeom>
+          <a:noFill/>
+          <a:ln/>
+        </p:spPr>
+        <p:txBody>
+          <a:bodyPr wrap="square" lIns="0" tIns="0" rIns="0" bIns="0" rtlCol="0" anchor="t"/>
+          <a:lstStyle/>
+          <a:p>
+            <a:pPr algn="r" indent="0" marL="0">
+              <a:buNone/>
+            </a:pPr>
+            <a:r>
+              <a:rPr lang="en-US" sz="1300" dirty="0">
+                <a:solidFill>
+                  <a:srgbClr val="CFE3EA"/>
+                </a:solidFill>
+                <a:latin typeface="Calibri" pitchFamily="34" charset="0"/>
+                <a:ea typeface="Calibri" pitchFamily="34" charset="-122"/>
+                <a:cs typeface="Calibri" pitchFamily="34" charset="-120"/>
+              </a:rPr>
+              <a:t>Lecture deck. The listings, the complete program and how to test it are in the code deck:</a:t>
+            </a:r>
+            <a:endParaRPr lang="en-US" sz="1300" dirty="0"/>
+          </a:p>
+          <a:p>
+            <a:pPr algn="r" indent="0" marL="0">
+              <a:buNone/>
+            </a:pPr>
+            <a:r>
+              <a:rPr lang="en-US" sz="1300" dirty="0">
+                <a:solidFill>
+                  <a:srgbClr val="CFE3EA"/>
+                </a:solidFill>
+                <a:latin typeface="Calibri" pitchFamily="34" charset="0"/>
+                <a:ea typeface="Calibri" pitchFamily="34" charset="-122"/>
+                <a:cs typeface="Calibri" pitchFamily="34" charset="-120"/>
+              </a:rPr>
+              <a:t>23-Computer_Architecture-Verm1_On_The_Cartridge_Store-Code.pptx</a:t>
+            </a:r>
+            <a:endParaRPr lang="en-US" sz="1300" dirty="0"/>
+          </a:p>
+        </p:txBody>
+      </p:sp>
+      <p:sp>
+        <p:nvSpPr>
+          <p:cNvPr id="14" name="Shape 12"/>
           <p:cNvSpPr/>
           <p:nvPr/>
         </p:nvSpPr>
@@ -2714,7 +2770,7 @@
       </p:sp>
       <p:pic>
         <p:nvPicPr>
-          <p:cNvPr id="14" name="Image 0" descr="/Users/raffaelemontella/devel/riscv-prg32/computer-architecture-with-prg32/tools/assets/prg32qt_store.png">    </p:cNvPr>
+          <p:cNvPr id="15" name="Image 0" descr="/Users/raffaelemontella/devel/riscv-prg32/computer-architecture-with-prg32/tools/assets/prg32qt_store.png">    </p:cNvPr>
           <p:cNvPicPr>
             <a:picLocks noChangeAspect="1"/>
           </p:cNvPicPr>

--- a/en/slides/23-Computer_Architecture-Verm1_On_The_Cartridge_Store.pptx
+++ b/en/slides/23-Computer_Architecture-Verm1_On_The_Cartridge_Store.pptx
@@ -119,7 +119,7 @@
   <p:extLst>
     <p:ext uri="{521415D9-36F7-43E2-AB2F-B90AF26B5E84}">
       <p14:sectionLst xmlns:p14="http://schemas.microsoft.com/office/powerpoint/2010/main">
-        <p14:section name="Opening" id="{b2678c1f-d886-6e4d-7f26-fab06b74aaf7}">
+        <p14:section name="Opening" id="{ca79fe9d-5e9f-a8c3-2648-2965c33411ba}">
           <p14:sldIdLst>
             <p14:sldId id="256"/>
             <p14:sldId id="257"/>
@@ -128,14 +128,14 @@
             <p14:sldId id="260"/>
           </p14:sldIdLst>
         </p14:section>
-        <p14:section name="Step 2: an identity" id="{cf136bbe-4176-412d-06db-6f64309fba8a}">
+        <p14:section name="Step 2: an identity" id="{6500cc6b-8eb4-e088-3425-2673164a9d3c}">
           <p14:sldIdLst>
             <p14:sldId id="261"/>
             <p14:sldId id="262"/>
             <p14:sldId id="263"/>
           </p14:sldIdLst>
         </p14:section>
-        <p14:section name="Step 5: publication" id="{de144b04-58d6-1a87-7086-6c8e2815fdc5}">
+        <p14:section name="Step 5: publication" id="{364da4fa-7679-e154-1be3-ffca880b8895}">
           <p14:sldIdLst>
             <p14:sldId id="264"/>
             <p14:sldId id="265"/>
@@ -549,6 +549,8 @@
             <a:r>
               <a:rPr lang="en-US" dirty="0"/>
               <a:t>The project ends today, with the step that turns a program into a product. Your Verm1 runs on your desk; at the end of this lecture it will be a single file that anyone can install, on the kit, on QEMU or on PRG32-QT, with a name, an icon and your signature. The quotation, from the team that built the first Macintosh, says that a work is finished only when it has been delivered.
+Learning status: UNDERSTAND NOW, by the end of this lecture you explain it, trace it and apply it on your own; USE NOW, you follow and use the recipe today; how it works inside is explained later, or is not part of the course; UNDERSTAND LATER, recognise the name and what it is for; a later lecture explains it. A slide without a badge is context: a story, an example, a question, an exercise.
+Learning status of this lecture. UNDERSTAND NOW: packaging and publishing; the portable cartridge. USE NOW: the PRG32 tools (used, not studied, in this course). UNDERSTAND LATER: nothing. A slide without a badge is context: a story, an example, a question, an exercise.
 For the lecturer: Last lecture of the project; Lecture 24 closes the course with an outlook. A tutorial again: at the end every student has a bundle, verm1-1.0.0.zip, checked and ready for submission. Uploading is a personal act with a personal token: do it in the laboratory only with students who want to. Everything up to the upload is run by tools/tests/verm1_store.py on the reference game.</a:t>
             </a:r>
             <a:endParaRPr lang="en-US" dirty="0"/>
@@ -638,6 +640,7 @@
             <a:r>
               <a:rPr lang="en-US" dirty="0"/>
               <a:t>The submission checklist, seven points: played to the end on every architecture; abi-table for every file; id unique and yours, version new, honest descriptions; authors, licence and colophon complete; the right metadata inside each cartridge; the bundle tested on another computer; the token in no file. A checklist is not bureaucracy: it is the instrument with which experts avoid the mistakes of experts.
+UNDERSTAND NOW: packaging and publishing.
 For the lecturer: Print it. A checklist is not bureaucracy: it is how pilots and surgeons avoid the mistakes that experts make.</a:t>
             </a:r>
             <a:endParaRPr lang="en-US" dirty="0"/>
@@ -907,6 +910,7 @@
             <a:r>
               <a:rPr lang="en-US" dirty="0"/>
               <a:t>What you built in this course. A game of six hundred lines of assembly, grown from three functions that only returned. With it, every layer of the machine: bits and numbers, gates and tables, state and memory, the processor, the screen, the devices. A method: one runnable step at a time, and a look inside whenever something surprises you. And the last step, which makes it engineering: a product with a name, a version and an author. The next lecture looks beyond the kit.
+Learning status, recap. UNDERSTAND NOW: packaging and publishing; the portable cartridge. USE NOW: the PRG32 tools (used, not studied, in this course). UNDERSTAND LATER: nothing. A slide without a badge is context: a story, an example, a question, an exercise.
 For the lecturer: The project ends here; Lecture 24 looks beyond the kit, to the machines that run the same instructions at scale. The project deliverables are the source of the student's variant and its bundle; the oral examination can start from any line of it.</a:t>
             </a:r>
             <a:endParaRPr lang="en-US" dirty="0"/>
@@ -1084,6 +1088,7 @@
             <a:r>
               <a:rPr lang="en-US" dirty="0"/>
               <a:t>Why publish? A program that runs only on its author's computer is an exercise; one that others can install is a product. Publishing forces you to answer questions that an exercise lets you skip: what is it called, who made it, on what does it run, what may others do with it. The Cartridge Store is the shelf of PRG32, and every cartridge on it was written by someone who began where you began.
+UNDERSTAND NOW: packaging and publishing.
 For the lecturer: The Store is at store.prg32.uniparthenope.it; its software is open, github.com/riscv-prg32/CartridgeStore. PRG32-QT has a Store browser of its own. Show both.</a:t>
             </a:r>
             <a:endParaRPr lang="en-US" dirty="0"/>
@@ -1173,6 +1178,7 @@
             <a:r>
               <a:rPr lang="en-US" dirty="0"/>
               <a:t>The path from source to shelf in six stages: your source file; two cartridges, one per architecture; the metadata, that is identity, icon and credits; the bundle; the review by an editor; the Store. The first four of today's steps happen entirely on your computer. Only the fifth talks to the Store: until then nothing leaves your machine.
+UNDERSTAND NOW: packaging and publishing.
 For the lecturer: The flow of the lecture. Nothing leaves the student's computer before the publish command.</a:t>
             </a:r>
             <a:endParaRPr lang="en-US" dirty="0"/>
@@ -1262,6 +1268,7 @@
             <a:r>
               <a:rPr lang="en-US" dirty="0"/>
               <a:t>Before packaging, ask whether the game is finished. Six checks, each with a method and an instrument. It starts, plays and ends: play three whole games. No frame is late: watch the telemetry. Memory is consistent: pause at random and compare ring, map and screen. It runs on the second architecture, QEMU, and on the real kit if you have one. And it is yours: it has something the reference does not have. A cartridge never run on a target should not be published for that target.
+UNDERSTAND NOW: packaging and publishing.
 For the lecturer: The debugger is used one last time, as a quality instrument. A cartridge that was never run on a target should not be published for that target.</a:t>
             </a:r>
             <a:endParaRPr lang="en-US" dirty="0"/>
@@ -1351,6 +1358,7 @@
             <a:r>
               <a:rPr lang="en-US" dirty="0"/>
               <a:t>Each field commits you to something. The id is by custom a reverse domain name, and never changes: put your own name in it, because two students cannot publish the same one. The version follows the scheme major, minor, patch, and a published version is treated as permanent: a mistake is corrected with a new version. The authors are all those who wrote the game. The license says what others may do with it. The tags are how it will be found.
+UNDERSTAND NOW: packaging and publishing.
 For the lecturer: Two students cannot publish the same id: each uses an id of their own, for example it.uniparthenope.arc12.&lt;surname&gt;.verm1. Agree on the convention in class. Treat an id and a version, once published, as permanent: a mistake is corrected by a new version, not by a replacement. It is a rule of practice (semantic versioning), which the players who already installed 1.0.0 rely on.</a:t>
             </a:r>
             <a:endParaRPr lang="en-US" dirty="0"/>
@@ -1440,6 +1448,7 @@
             <a:r>
               <a:rPr lang="en-US" dirty="0"/>
               <a:t>The icon is a small PNG image that represents the game on the shelf. The reference one is 64 by 64 pixels: a worm and a piece of food in the colours of the game. Pixel art suits a machine of this resolution: draw large, cell by cell, with any editor that saves PNG. Save it as icon.png next to the manifest. And draw it yourself: an image taken from the web is somebody else's work.
+UNDERSTAND NOW: packaging and publishing.
 For the lecturer: The reference icon is verm1/store/icon.png. An icon taken from the web is somebody else's work: draw your own.</a:t>
             </a:r>
             <a:endParaRPr lang="en-US" dirty="0"/>
@@ -1529,6 +1538,7 @@
             <a:r>
               <a:rPr lang="en-US" dirty="0"/>
               <a:t>A tribute is not a copy. Verm1 is a tribute to Snake: the idea of a worm that grows is as old as Blockade, of 1976, and belongs to everyone. The name, the code, the icon and the sounds are ours. The rules of a game are not protected; code, pictures, music and names are. So before publishing, ask of every piece: did I make it myself? If not, does its licence allow me to publish it, and did I give credit? Your name goes on it: publish only what you would sign.
+UNDERSTAND NOW: packaging and publishing.
 For the lecturer: Game rules are not protected; code, pictures, music and names are. A short and concrete introduction to authorship, which engineers meet early.</a:t>
             </a:r>
             <a:endParaRPr lang="en-US" dirty="0"/>
@@ -1618,6 +1628,7 @@
             <a:r>
               <a:rPr lang="en-US" dirty="0"/>
               <a:t>What happens next, in four stages. Pending: the bundle is kept as a submission, and is not yet on the shelf. Review: an editor checks that it installs, runs, is described honestly and contains nothing that is not yours. Published: the game appears in the Store for the architectures you declared. And if you find a bug: correct it, raise the version to 1.0.1, pack and submit again; version 1.0.0 remains as it was.
+UNDERSTAND NOW: packaging and publishing.
 For the lecturer: Moderation protects the players and the authors. A rejection comes with a reason: answer it with a new version.</a:t>
             </a:r>
             <a:endParaRPr lang="en-US" dirty="0"/>
@@ -2794,6 +2805,420 @@
       </p:pic>
       <p:sp>
         <p:nvSpPr>
+          <p:cNvPr id="16" name="Shape 13"/>
+          <p:cNvSpPr/>
+          <p:nvPr/>
+        </p:nvSpPr>
+        <p:spPr>
+          <a:xfrm>
+            <a:off x="9690303" y="91440"/>
+            <a:ext cx="1952752" cy="274320"/>
+          </a:xfrm>
+          <a:prstGeom prst="rect">
+            <a:avLst/>
+          </a:prstGeom>
+          <a:solidFill>
+            <a:srgbClr val="F3E8FF"/>
+          </a:solidFill>
+          <a:ln w="12700">
+            <a:solidFill>
+              <a:srgbClr val="7E22CE"/>
+            </a:solidFill>
+            <a:prstDash val="dash"/>
+          </a:ln>
+        </p:spPr>
+      </p:sp>
+      <p:sp>
+        <p:nvSpPr>
+          <p:cNvPr id="17" name="Shape 14"/>
+          <p:cNvSpPr/>
+          <p:nvPr/>
+        </p:nvSpPr>
+        <p:spPr>
+          <a:xfrm>
+            <a:off x="9717735" y="128016"/>
+            <a:ext cx="45720" cy="45720"/>
+          </a:xfrm>
+          <a:prstGeom prst="rect">
+            <a:avLst/>
+          </a:prstGeom>
+          <a:solidFill>
+            <a:srgbClr val="7E22CE"/>
+          </a:solidFill>
+          <a:ln w="12700">
+            <a:solidFill>
+              <a:srgbClr val="7E22CE"/>
+            </a:solidFill>
+            <a:prstDash val="solid"/>
+          </a:ln>
+        </p:spPr>
+      </p:sp>
+      <p:sp>
+        <p:nvSpPr>
+          <p:cNvPr id="18" name="Shape 15"/>
+          <p:cNvSpPr/>
+          <p:nvPr/>
+        </p:nvSpPr>
+        <p:spPr>
+          <a:xfrm>
+            <a:off x="9717735" y="205740"/>
+            <a:ext cx="45720" cy="45720"/>
+          </a:xfrm>
+          <a:prstGeom prst="rect">
+            <a:avLst/>
+          </a:prstGeom>
+          <a:solidFill>
+            <a:srgbClr val="7E22CE"/>
+          </a:solidFill>
+          <a:ln w="12700">
+            <a:solidFill>
+              <a:srgbClr val="7E22CE"/>
+            </a:solidFill>
+            <a:prstDash val="solid"/>
+          </a:ln>
+        </p:spPr>
+      </p:sp>
+      <p:sp>
+        <p:nvSpPr>
+          <p:cNvPr id="19" name="Shape 16"/>
+          <p:cNvSpPr/>
+          <p:nvPr/>
+        </p:nvSpPr>
+        <p:spPr>
+          <a:xfrm>
+            <a:off x="9717735" y="283464"/>
+            <a:ext cx="45720" cy="45720"/>
+          </a:xfrm>
+          <a:prstGeom prst="rect">
+            <a:avLst/>
+          </a:prstGeom>
+          <a:solidFill>
+            <a:srgbClr val="7E22CE"/>
+          </a:solidFill>
+          <a:ln w="12700">
+            <a:solidFill>
+              <a:srgbClr val="7E22CE"/>
+            </a:solidFill>
+            <a:prstDash val="solid"/>
+          </a:ln>
+        </p:spPr>
+      </p:sp>
+      <p:pic>
+        <p:nvPicPr>
+          <p:cNvPr id="20" name="Image 1" descr="preencoded.png">    </p:cNvPr>
+          <p:cNvPicPr>
+            <a:picLocks noChangeAspect="1"/>
+          </p:cNvPicPr>
+          <p:nvPr/>
+        </p:nvPicPr>
+        <p:blipFill>
+          <a:blip r:embed="rId2"/>
+          <a:stretch>
+            <a:fillRect/>
+          </a:stretch>
+        </p:blipFill>
+        <p:spPr>
+          <a:xfrm>
+            <a:off x="9818319" y="128016"/>
+            <a:ext cx="201168" cy="201168"/>
+          </a:xfrm>
+          <a:prstGeom prst="rect">
+            <a:avLst/>
+          </a:prstGeom>
+        </p:spPr>
+      </p:pic>
+      <p:sp>
+        <p:nvSpPr>
+          <p:cNvPr id="21" name="Text 17"/>
+          <p:cNvSpPr txBox="1"/>
+          <p:nvPr/>
+        </p:nvSpPr>
+        <p:spPr>
+          <a:xfrm>
+            <a:off x="10074351" y="91440"/>
+            <a:ext cx="1532128" cy="274320"/>
+          </a:xfrm>
+          <a:prstGeom prst="rect">
+            <a:avLst/>
+          </a:prstGeom>
+          <a:noFill/>
+          <a:ln/>
+        </p:spPr>
+        <p:txBody>
+          <a:bodyPr wrap="square" lIns="0" tIns="0" rIns="0" bIns="0" rtlCol="0" anchor="ctr"/>
+          <a:lstStyle/>
+          <a:p>
+            <a:pPr indent="0" marL="0">
+              <a:buNone/>
+            </a:pPr>
+            <a:r>
+              <a:rPr lang="en-US" sz="1100" b="1" dirty="0">
+                <a:solidFill>
+                  <a:srgbClr val="6B21A8"/>
+                </a:solidFill>
+                <a:latin typeface="Calibri" pitchFamily="34" charset="0"/>
+                <a:ea typeface="Calibri" pitchFamily="34" charset="-122"/>
+                <a:cs typeface="Calibri" pitchFamily="34" charset="-120"/>
+              </a:rPr>
+              <a:t>UNDERSTAND LATER</a:t>
+            </a:r>
+            <a:endParaRPr lang="en-US" sz="1100" dirty="0"/>
+          </a:p>
+        </p:txBody>
+      </p:sp>
+      <p:sp>
+        <p:nvSpPr>
+          <p:cNvPr id="22" name="Shape 18"/>
+          <p:cNvSpPr/>
+          <p:nvPr/>
+        </p:nvSpPr>
+        <p:spPr>
+          <a:xfrm>
+            <a:off x="8407349" y="91440"/>
+            <a:ext cx="1173226" cy="274320"/>
+          </a:xfrm>
+          <a:prstGeom prst="rect">
+            <a:avLst/>
+          </a:prstGeom>
+          <a:solidFill>
+            <a:srgbClr val="FEF3C7"/>
+          </a:solidFill>
+          <a:ln w="12700">
+            <a:solidFill>
+              <a:srgbClr val="B45309"/>
+            </a:solidFill>
+            <a:prstDash val="solid"/>
+          </a:ln>
+        </p:spPr>
+      </p:sp>
+      <p:sp>
+        <p:nvSpPr>
+          <p:cNvPr id="23" name="Shape 19"/>
+          <p:cNvSpPr/>
+          <p:nvPr/>
+        </p:nvSpPr>
+        <p:spPr>
+          <a:xfrm>
+            <a:off x="8407349" y="91440"/>
+            <a:ext cx="27432" cy="274320"/>
+          </a:xfrm>
+          <a:prstGeom prst="rect">
+            <a:avLst/>
+          </a:prstGeom>
+          <a:solidFill>
+            <a:srgbClr val="B45309"/>
+          </a:solidFill>
+          <a:ln w="12700">
+            <a:solidFill>
+              <a:srgbClr val="B45309"/>
+            </a:solidFill>
+            <a:prstDash val="solid"/>
+          </a:ln>
+        </p:spPr>
+      </p:sp>
+      <p:sp>
+        <p:nvSpPr>
+          <p:cNvPr id="24" name="Shape 20"/>
+          <p:cNvSpPr/>
+          <p:nvPr/>
+        </p:nvSpPr>
+        <p:spPr>
+          <a:xfrm>
+            <a:off x="8462213" y="91440"/>
+            <a:ext cx="27432" cy="274320"/>
+          </a:xfrm>
+          <a:prstGeom prst="rect">
+            <a:avLst/>
+          </a:prstGeom>
+          <a:solidFill>
+            <a:srgbClr val="B45309"/>
+          </a:solidFill>
+          <a:ln w="12700">
+            <a:solidFill>
+              <a:srgbClr val="B45309"/>
+            </a:solidFill>
+            <a:prstDash val="solid"/>
+          </a:ln>
+        </p:spPr>
+      </p:sp>
+      <p:pic>
+        <p:nvPicPr>
+          <p:cNvPr id="25" name="Image 2" descr="preencoded.png">    </p:cNvPr>
+          <p:cNvPicPr>
+            <a:picLocks noChangeAspect="1"/>
+          </p:cNvPicPr>
+          <p:nvPr/>
+        </p:nvPicPr>
+        <p:blipFill>
+          <a:blip r:embed="rId3"/>
+          <a:stretch>
+            <a:fillRect/>
+          </a:stretch>
+        </p:blipFill>
+        <p:spPr>
+          <a:xfrm>
+            <a:off x="8535365" y="128016"/>
+            <a:ext cx="201168" cy="201168"/>
+          </a:xfrm>
+          <a:prstGeom prst="rect">
+            <a:avLst/>
+          </a:prstGeom>
+        </p:spPr>
+      </p:pic>
+      <p:sp>
+        <p:nvSpPr>
+          <p:cNvPr id="26" name="Text 21"/>
+          <p:cNvSpPr txBox="1"/>
+          <p:nvPr/>
+        </p:nvSpPr>
+        <p:spPr>
+          <a:xfrm>
+            <a:off x="8791397" y="91440"/>
+            <a:ext cx="752602" cy="274320"/>
+          </a:xfrm>
+          <a:prstGeom prst="rect">
+            <a:avLst/>
+          </a:prstGeom>
+          <a:noFill/>
+          <a:ln/>
+        </p:spPr>
+        <p:txBody>
+          <a:bodyPr wrap="square" lIns="0" tIns="0" rIns="0" bIns="0" rtlCol="0" anchor="ctr"/>
+          <a:lstStyle/>
+          <a:p>
+            <a:pPr indent="0" marL="0">
+              <a:buNone/>
+            </a:pPr>
+            <a:r>
+              <a:rPr lang="en-US" sz="1100" b="1" dirty="0">
+                <a:solidFill>
+                  <a:srgbClr val="92400E"/>
+                </a:solidFill>
+                <a:latin typeface="Calibri" pitchFamily="34" charset="0"/>
+                <a:ea typeface="Calibri" pitchFamily="34" charset="-122"/>
+                <a:cs typeface="Calibri" pitchFamily="34" charset="-120"/>
+              </a:rPr>
+              <a:t>USE NOW</a:t>
+            </a:r>
+            <a:endParaRPr lang="en-US" sz="1100" dirty="0"/>
+          </a:p>
+        </p:txBody>
+      </p:sp>
+      <p:sp>
+        <p:nvSpPr>
+          <p:cNvPr id="27" name="Shape 22"/>
+          <p:cNvSpPr/>
+          <p:nvPr/>
+        </p:nvSpPr>
+        <p:spPr>
+          <a:xfrm>
+            <a:off x="6518097" y="91440"/>
+            <a:ext cx="1779524" cy="274320"/>
+          </a:xfrm>
+          <a:prstGeom prst="rect">
+            <a:avLst/>
+          </a:prstGeom>
+          <a:solidFill>
+            <a:srgbClr val="E0F2FE"/>
+          </a:solidFill>
+          <a:ln w="12700">
+            <a:solidFill>
+              <a:srgbClr val="0369A1"/>
+            </a:solidFill>
+            <a:prstDash val="solid"/>
+          </a:ln>
+        </p:spPr>
+      </p:sp>
+      <p:sp>
+        <p:nvSpPr>
+          <p:cNvPr id="28" name="Shape 23"/>
+          <p:cNvSpPr/>
+          <p:nvPr/>
+        </p:nvSpPr>
+        <p:spPr>
+          <a:xfrm>
+            <a:off x="6518097" y="91440"/>
+            <a:ext cx="73152" cy="274320"/>
+          </a:xfrm>
+          <a:prstGeom prst="rect">
+            <a:avLst/>
+          </a:prstGeom>
+          <a:solidFill>
+            <a:srgbClr val="0369A1"/>
+          </a:solidFill>
+          <a:ln w="12700">
+            <a:solidFill>
+              <a:srgbClr val="0369A1"/>
+            </a:solidFill>
+            <a:prstDash val="solid"/>
+          </a:ln>
+        </p:spPr>
+      </p:sp>
+      <p:pic>
+        <p:nvPicPr>
+          <p:cNvPr id="29" name="Image 3" descr="preencoded.png">    </p:cNvPr>
+          <p:cNvPicPr>
+            <a:picLocks noChangeAspect="1"/>
+          </p:cNvPicPr>
+          <p:nvPr/>
+        </p:nvPicPr>
+        <p:blipFill>
+          <a:blip r:embed="rId4"/>
+          <a:stretch>
+            <a:fillRect/>
+          </a:stretch>
+        </p:blipFill>
+        <p:spPr>
+          <a:xfrm>
+            <a:off x="6646113" y="128016"/>
+            <a:ext cx="201168" cy="201168"/>
+          </a:xfrm>
+          <a:prstGeom prst="rect">
+            <a:avLst/>
+          </a:prstGeom>
+        </p:spPr>
+      </p:pic>
+      <p:sp>
+        <p:nvSpPr>
+          <p:cNvPr id="30" name="Text 24"/>
+          <p:cNvSpPr txBox="1"/>
+          <p:nvPr/>
+        </p:nvSpPr>
+        <p:spPr>
+          <a:xfrm>
+            <a:off x="6902145" y="91440"/>
+            <a:ext cx="1358900" cy="274320"/>
+          </a:xfrm>
+          <a:prstGeom prst="rect">
+            <a:avLst/>
+          </a:prstGeom>
+          <a:noFill/>
+          <a:ln/>
+        </p:spPr>
+        <p:txBody>
+          <a:bodyPr wrap="square" lIns="0" tIns="0" rIns="0" bIns="0" rtlCol="0" anchor="ctr"/>
+          <a:lstStyle/>
+          <a:p>
+            <a:pPr indent="0" marL="0">
+              <a:buNone/>
+            </a:pPr>
+            <a:r>
+              <a:rPr lang="en-US" sz="1100" b="1" dirty="0">
+                <a:solidFill>
+                  <a:srgbClr val="075985"/>
+                </a:solidFill>
+                <a:latin typeface="Calibri" pitchFamily="34" charset="0"/>
+                <a:ea typeface="Calibri" pitchFamily="34" charset="-122"/>
+                <a:cs typeface="Calibri" pitchFamily="34" charset="-120"/>
+              </a:rPr>
+              <a:t>UNDERSTAND NOW</a:t>
+            </a:r>
+            <a:endParaRPr lang="en-US" sz="1100" dirty="0"/>
+          </a:p>
+        </p:txBody>
+      </p:sp>
+      <p:sp>
+        <p:nvSpPr>
           <p:cNvPr id="25" name="Slide Number Placeholder 0"/>
           <p:cNvSpPr>
             <a:spLocks noGrp="1"/>
@@ -4031,6 +4456,133 @@
       </p:graphicFrame>
       <p:sp>
         <p:nvSpPr>
+          <p:cNvPr id="4" name="Shape 1"/>
+          <p:cNvSpPr/>
+          <p:nvPr/>
+        </p:nvSpPr>
+        <p:spPr>
+          <a:xfrm>
+            <a:off x="8090738" y="91440"/>
+            <a:ext cx="3552317" cy="274320"/>
+          </a:xfrm>
+          <a:prstGeom prst="rect">
+            <a:avLst/>
+          </a:prstGeom>
+          <a:solidFill>
+            <a:srgbClr val="E0F2FE"/>
+          </a:solidFill>
+          <a:ln w="12700">
+            <a:solidFill>
+              <a:srgbClr val="0369A1"/>
+            </a:solidFill>
+            <a:prstDash val="solid"/>
+          </a:ln>
+        </p:spPr>
+      </p:sp>
+      <p:sp>
+        <p:nvSpPr>
+          <p:cNvPr id="5" name="Shape 2"/>
+          <p:cNvSpPr/>
+          <p:nvPr/>
+        </p:nvSpPr>
+        <p:spPr>
+          <a:xfrm>
+            <a:off x="8090738" y="91440"/>
+            <a:ext cx="73152" cy="274320"/>
+          </a:xfrm>
+          <a:prstGeom prst="rect">
+            <a:avLst/>
+          </a:prstGeom>
+          <a:solidFill>
+            <a:srgbClr val="0369A1"/>
+          </a:solidFill>
+          <a:ln w="12700">
+            <a:solidFill>
+              <a:srgbClr val="0369A1"/>
+            </a:solidFill>
+            <a:prstDash val="solid"/>
+          </a:ln>
+        </p:spPr>
+      </p:sp>
+      <p:pic>
+        <p:nvPicPr>
+          <p:cNvPr id="6" name="Image 0" descr="preencoded.png">    </p:cNvPr>
+          <p:cNvPicPr>
+            <a:picLocks noChangeAspect="1"/>
+          </p:cNvPicPr>
+          <p:nvPr/>
+        </p:nvPicPr>
+        <p:blipFill>
+          <a:blip r:embed="rId1"/>
+          <a:stretch>
+            <a:fillRect/>
+          </a:stretch>
+        </p:blipFill>
+        <p:spPr>
+          <a:xfrm>
+            <a:off x="8218754" y="128016"/>
+            <a:ext cx="201168" cy="201168"/>
+          </a:xfrm>
+          <a:prstGeom prst="rect">
+            <a:avLst/>
+          </a:prstGeom>
+        </p:spPr>
+      </p:pic>
+      <p:sp>
+        <p:nvSpPr>
+          <p:cNvPr id="7" name="Text 3"/>
+          <p:cNvSpPr txBox="1"/>
+          <p:nvPr/>
+        </p:nvSpPr>
+        <p:spPr>
+          <a:xfrm>
+            <a:off x="8474786" y="91440"/>
+            <a:ext cx="3131693" cy="274320"/>
+          </a:xfrm>
+          <a:prstGeom prst="rect">
+            <a:avLst/>
+          </a:prstGeom>
+          <a:noFill/>
+          <a:ln/>
+        </p:spPr>
+        <p:txBody>
+          <a:bodyPr wrap="square" lIns="0" tIns="0" rIns="0" bIns="0" rtlCol="0" anchor="ctr"/>
+          <a:lstStyle/>
+          <a:p>
+            <a:pPr indent="0" marL="0">
+              <a:buNone/>
+            </a:pPr>
+            <a:r>
+              <a:rPr lang="en-US" sz="1100" b="1" dirty="0">
+                <a:solidFill>
+                  <a:srgbClr val="075985"/>
+                </a:solidFill>
+                <a:latin typeface="Calibri" pitchFamily="34" charset="0"/>
+                <a:ea typeface="Calibri" pitchFamily="34" charset="-122"/>
+                <a:cs typeface="Calibri" pitchFamily="34" charset="-120"/>
+              </a:rPr>
+              <a:t>UNDERSTAND NOW</a:t>
+            </a:r>
+            <a:pPr indent="0" marL="0">
+              <a:buNone/>
+            </a:pPr>
+            <a:r>
+              <a:rPr lang="en-US" sz="1100" dirty="0">
+                <a:solidFill>
+                  <a:srgbClr val="075985"/>
+                </a:solidFill>
+                <a:latin typeface="Calibri" pitchFamily="34" charset="0"/>
+                <a:ea typeface="Calibri" pitchFamily="34" charset="-122"/>
+                <a:cs typeface="Calibri" pitchFamily="34" charset="-120"/>
+              </a:rPr>
+              <a:t> · packaging and publishing</a:t>
+            </a:r>
+            <a:endParaRPr lang="en-US" sz="1100" dirty="0"/>
+          </a:p>
+        </p:txBody>
+      </p:sp>
+      <p:sp>
+        <p:nvSpPr>
           <p:cNvPr id="25" name="Slide Number Placeholder 0"/>
           <p:cNvSpPr>
             <a:spLocks noGrp="1"/>
@@ -7346,6 +7898,133 @@
       </p:sp>
       <p:sp>
         <p:nvSpPr>
+          <p:cNvPr id="15" name="Shape 12"/>
+          <p:cNvSpPr/>
+          <p:nvPr/>
+        </p:nvSpPr>
+        <p:spPr>
+          <a:xfrm>
+            <a:off x="8090738" y="91440"/>
+            <a:ext cx="3552317" cy="274320"/>
+          </a:xfrm>
+          <a:prstGeom prst="rect">
+            <a:avLst/>
+          </a:prstGeom>
+          <a:solidFill>
+            <a:srgbClr val="E0F2FE"/>
+          </a:solidFill>
+          <a:ln w="12700">
+            <a:solidFill>
+              <a:srgbClr val="0369A1"/>
+            </a:solidFill>
+            <a:prstDash val="solid"/>
+          </a:ln>
+        </p:spPr>
+      </p:sp>
+      <p:sp>
+        <p:nvSpPr>
+          <p:cNvPr id="16" name="Shape 13"/>
+          <p:cNvSpPr/>
+          <p:nvPr/>
+        </p:nvSpPr>
+        <p:spPr>
+          <a:xfrm>
+            <a:off x="8090738" y="91440"/>
+            <a:ext cx="73152" cy="274320"/>
+          </a:xfrm>
+          <a:prstGeom prst="rect">
+            <a:avLst/>
+          </a:prstGeom>
+          <a:solidFill>
+            <a:srgbClr val="0369A1"/>
+          </a:solidFill>
+          <a:ln w="12700">
+            <a:solidFill>
+              <a:srgbClr val="0369A1"/>
+            </a:solidFill>
+            <a:prstDash val="solid"/>
+          </a:ln>
+        </p:spPr>
+      </p:sp>
+      <p:pic>
+        <p:nvPicPr>
+          <p:cNvPr id="17" name="Image 1" descr="preencoded.png">    </p:cNvPr>
+          <p:cNvPicPr>
+            <a:picLocks noChangeAspect="1"/>
+          </p:cNvPicPr>
+          <p:nvPr/>
+        </p:nvPicPr>
+        <p:blipFill>
+          <a:blip r:embed="rId2"/>
+          <a:stretch>
+            <a:fillRect/>
+          </a:stretch>
+        </p:blipFill>
+        <p:spPr>
+          <a:xfrm>
+            <a:off x="8218754" y="128016"/>
+            <a:ext cx="201168" cy="201168"/>
+          </a:xfrm>
+          <a:prstGeom prst="rect">
+            <a:avLst/>
+          </a:prstGeom>
+        </p:spPr>
+      </p:pic>
+      <p:sp>
+        <p:nvSpPr>
+          <p:cNvPr id="18" name="Text 14"/>
+          <p:cNvSpPr txBox="1"/>
+          <p:nvPr/>
+        </p:nvSpPr>
+        <p:spPr>
+          <a:xfrm>
+            <a:off x="8474786" y="91440"/>
+            <a:ext cx="3131693" cy="274320"/>
+          </a:xfrm>
+          <a:prstGeom prst="rect">
+            <a:avLst/>
+          </a:prstGeom>
+          <a:noFill/>
+          <a:ln/>
+        </p:spPr>
+        <p:txBody>
+          <a:bodyPr wrap="square" lIns="0" tIns="0" rIns="0" bIns="0" rtlCol="0" anchor="ctr"/>
+          <a:lstStyle/>
+          <a:p>
+            <a:pPr indent="0" marL="0">
+              <a:buNone/>
+            </a:pPr>
+            <a:r>
+              <a:rPr lang="en-US" sz="1100" b="1" dirty="0">
+                <a:solidFill>
+                  <a:srgbClr val="075985"/>
+                </a:solidFill>
+                <a:latin typeface="Calibri" pitchFamily="34" charset="0"/>
+                <a:ea typeface="Calibri" pitchFamily="34" charset="-122"/>
+                <a:cs typeface="Calibri" pitchFamily="34" charset="-120"/>
+              </a:rPr>
+              <a:t>UNDERSTAND NOW</a:t>
+            </a:r>
+            <a:pPr indent="0" marL="0">
+              <a:buNone/>
+            </a:pPr>
+            <a:r>
+              <a:rPr lang="en-US" sz="1100" dirty="0">
+                <a:solidFill>
+                  <a:srgbClr val="075985"/>
+                </a:solidFill>
+                <a:latin typeface="Calibri" pitchFamily="34" charset="0"/>
+                <a:ea typeface="Calibri" pitchFamily="34" charset="-122"/>
+                <a:cs typeface="Calibri" pitchFamily="34" charset="-120"/>
+              </a:rPr>
+              <a:t> · packaging and publishing</a:t>
+            </a:r>
+            <a:endParaRPr lang="en-US" sz="1100" dirty="0"/>
+          </a:p>
+        </p:txBody>
+      </p:sp>
+      <p:sp>
+        <p:nvSpPr>
           <p:cNvPr id="25" name="Slide Number Placeholder 0"/>
           <p:cNvSpPr>
             <a:spLocks noGrp="1"/>
@@ -8324,6 +9003,133 @@
               <a:t>Steps 1 to 4 of today happen on your computer. Only step 5 talks to the Store.</a:t>
             </a:r>
             <a:endParaRPr lang="en-US" sz="2000" dirty="0"/>
+          </a:p>
+        </p:txBody>
+      </p:sp>
+      <p:sp>
+        <p:nvSpPr>
+          <p:cNvPr id="28" name="Shape 26"/>
+          <p:cNvSpPr/>
+          <p:nvPr/>
+        </p:nvSpPr>
+        <p:spPr>
+          <a:xfrm>
+            <a:off x="8090738" y="91440"/>
+            <a:ext cx="3552317" cy="274320"/>
+          </a:xfrm>
+          <a:prstGeom prst="rect">
+            <a:avLst/>
+          </a:prstGeom>
+          <a:solidFill>
+            <a:srgbClr val="E0F2FE"/>
+          </a:solidFill>
+          <a:ln w="12700">
+            <a:solidFill>
+              <a:srgbClr val="0369A1"/>
+            </a:solidFill>
+            <a:prstDash val="solid"/>
+          </a:ln>
+        </p:spPr>
+      </p:sp>
+      <p:sp>
+        <p:nvSpPr>
+          <p:cNvPr id="29" name="Shape 27"/>
+          <p:cNvSpPr/>
+          <p:nvPr/>
+        </p:nvSpPr>
+        <p:spPr>
+          <a:xfrm>
+            <a:off x="8090738" y="91440"/>
+            <a:ext cx="73152" cy="274320"/>
+          </a:xfrm>
+          <a:prstGeom prst="rect">
+            <a:avLst/>
+          </a:prstGeom>
+          <a:solidFill>
+            <a:srgbClr val="0369A1"/>
+          </a:solidFill>
+          <a:ln w="12700">
+            <a:solidFill>
+              <a:srgbClr val="0369A1"/>
+            </a:solidFill>
+            <a:prstDash val="solid"/>
+          </a:ln>
+        </p:spPr>
+      </p:sp>
+      <p:pic>
+        <p:nvPicPr>
+          <p:cNvPr id="30" name="Image 0" descr="preencoded.png">    </p:cNvPr>
+          <p:cNvPicPr>
+            <a:picLocks noChangeAspect="1"/>
+          </p:cNvPicPr>
+          <p:nvPr/>
+        </p:nvPicPr>
+        <p:blipFill>
+          <a:blip r:embed="rId1"/>
+          <a:stretch>
+            <a:fillRect/>
+          </a:stretch>
+        </p:blipFill>
+        <p:spPr>
+          <a:xfrm>
+            <a:off x="8218754" y="128016"/>
+            <a:ext cx="201168" cy="201168"/>
+          </a:xfrm>
+          <a:prstGeom prst="rect">
+            <a:avLst/>
+          </a:prstGeom>
+        </p:spPr>
+      </p:pic>
+      <p:sp>
+        <p:nvSpPr>
+          <p:cNvPr id="31" name="Text 28"/>
+          <p:cNvSpPr txBox="1"/>
+          <p:nvPr/>
+        </p:nvSpPr>
+        <p:spPr>
+          <a:xfrm>
+            <a:off x="8474786" y="91440"/>
+            <a:ext cx="3131693" cy="274320"/>
+          </a:xfrm>
+          <a:prstGeom prst="rect">
+            <a:avLst/>
+          </a:prstGeom>
+          <a:noFill/>
+          <a:ln/>
+        </p:spPr>
+        <p:txBody>
+          <a:bodyPr wrap="square" lIns="0" tIns="0" rIns="0" bIns="0" rtlCol="0" anchor="ctr"/>
+          <a:lstStyle/>
+          <a:p>
+            <a:pPr indent="0" marL="0">
+              <a:buNone/>
+            </a:pPr>
+            <a:r>
+              <a:rPr lang="en-US" sz="1100" b="1" dirty="0">
+                <a:solidFill>
+                  <a:srgbClr val="075985"/>
+                </a:solidFill>
+                <a:latin typeface="Calibri" pitchFamily="34" charset="0"/>
+                <a:ea typeface="Calibri" pitchFamily="34" charset="-122"/>
+                <a:cs typeface="Calibri" pitchFamily="34" charset="-120"/>
+              </a:rPr>
+              <a:t>UNDERSTAND NOW</a:t>
+            </a:r>
+            <a:pPr indent="0" marL="0">
+              <a:buNone/>
+            </a:pPr>
+            <a:r>
+              <a:rPr lang="en-US" sz="1100" dirty="0">
+                <a:solidFill>
+                  <a:srgbClr val="075985"/>
+                </a:solidFill>
+                <a:latin typeface="Calibri" pitchFamily="34" charset="0"/>
+                <a:ea typeface="Calibri" pitchFamily="34" charset="-122"/>
+                <a:cs typeface="Calibri" pitchFamily="34" charset="-120"/>
+              </a:rPr>
+              <a:t> · packaging and publishing</a:t>
+            </a:r>
+            <a:endParaRPr lang="en-US" sz="1100" dirty="0"/>
           </a:p>
         </p:txBody>
       </p:sp>
@@ -9916,6 +10722,133 @@
       </p:graphicFrame>
       <p:sp>
         <p:nvSpPr>
+          <p:cNvPr id="4" name="Shape 1"/>
+          <p:cNvSpPr/>
+          <p:nvPr/>
+        </p:nvSpPr>
+        <p:spPr>
+          <a:xfrm>
+            <a:off x="8090738" y="91440"/>
+            <a:ext cx="3552317" cy="274320"/>
+          </a:xfrm>
+          <a:prstGeom prst="rect">
+            <a:avLst/>
+          </a:prstGeom>
+          <a:solidFill>
+            <a:srgbClr val="E0F2FE"/>
+          </a:solidFill>
+          <a:ln w="12700">
+            <a:solidFill>
+              <a:srgbClr val="0369A1"/>
+            </a:solidFill>
+            <a:prstDash val="solid"/>
+          </a:ln>
+        </p:spPr>
+      </p:sp>
+      <p:sp>
+        <p:nvSpPr>
+          <p:cNvPr id="5" name="Shape 2"/>
+          <p:cNvSpPr/>
+          <p:nvPr/>
+        </p:nvSpPr>
+        <p:spPr>
+          <a:xfrm>
+            <a:off x="8090738" y="91440"/>
+            <a:ext cx="73152" cy="274320"/>
+          </a:xfrm>
+          <a:prstGeom prst="rect">
+            <a:avLst/>
+          </a:prstGeom>
+          <a:solidFill>
+            <a:srgbClr val="0369A1"/>
+          </a:solidFill>
+          <a:ln w="12700">
+            <a:solidFill>
+              <a:srgbClr val="0369A1"/>
+            </a:solidFill>
+            <a:prstDash val="solid"/>
+          </a:ln>
+        </p:spPr>
+      </p:sp>
+      <p:pic>
+        <p:nvPicPr>
+          <p:cNvPr id="6" name="Image 0" descr="preencoded.png">    </p:cNvPr>
+          <p:cNvPicPr>
+            <a:picLocks noChangeAspect="1"/>
+          </p:cNvPicPr>
+          <p:nvPr/>
+        </p:nvPicPr>
+        <p:blipFill>
+          <a:blip r:embed="rId1"/>
+          <a:stretch>
+            <a:fillRect/>
+          </a:stretch>
+        </p:blipFill>
+        <p:spPr>
+          <a:xfrm>
+            <a:off x="8218754" y="128016"/>
+            <a:ext cx="201168" cy="201168"/>
+          </a:xfrm>
+          <a:prstGeom prst="rect">
+            <a:avLst/>
+          </a:prstGeom>
+        </p:spPr>
+      </p:pic>
+      <p:sp>
+        <p:nvSpPr>
+          <p:cNvPr id="7" name="Text 3"/>
+          <p:cNvSpPr txBox="1"/>
+          <p:nvPr/>
+        </p:nvSpPr>
+        <p:spPr>
+          <a:xfrm>
+            <a:off x="8474786" y="91440"/>
+            <a:ext cx="3131693" cy="274320"/>
+          </a:xfrm>
+          <a:prstGeom prst="rect">
+            <a:avLst/>
+          </a:prstGeom>
+          <a:noFill/>
+          <a:ln/>
+        </p:spPr>
+        <p:txBody>
+          <a:bodyPr wrap="square" lIns="0" tIns="0" rIns="0" bIns="0" rtlCol="0" anchor="ctr"/>
+          <a:lstStyle/>
+          <a:p>
+            <a:pPr indent="0" marL="0">
+              <a:buNone/>
+            </a:pPr>
+            <a:r>
+              <a:rPr lang="en-US" sz="1100" b="1" dirty="0">
+                <a:solidFill>
+                  <a:srgbClr val="075985"/>
+                </a:solidFill>
+                <a:latin typeface="Calibri" pitchFamily="34" charset="0"/>
+                <a:ea typeface="Calibri" pitchFamily="34" charset="-122"/>
+                <a:cs typeface="Calibri" pitchFamily="34" charset="-120"/>
+              </a:rPr>
+              <a:t>UNDERSTAND NOW</a:t>
+            </a:r>
+            <a:pPr indent="0" marL="0">
+              <a:buNone/>
+            </a:pPr>
+            <a:r>
+              <a:rPr lang="en-US" sz="1100" dirty="0">
+                <a:solidFill>
+                  <a:srgbClr val="075985"/>
+                </a:solidFill>
+                <a:latin typeface="Calibri" pitchFamily="34" charset="0"/>
+                <a:ea typeface="Calibri" pitchFamily="34" charset="-122"/>
+                <a:cs typeface="Calibri" pitchFamily="34" charset="-120"/>
+              </a:rPr>
+              <a:t> · packaging and publishing</a:t>
+            </a:r>
+            <a:endParaRPr lang="en-US" sz="1100" dirty="0"/>
+          </a:p>
+        </p:txBody>
+      </p:sp>
+      <p:sp>
+        <p:nvSpPr>
           <p:cNvPr id="25" name="Slide Number Placeholder 0"/>
           <p:cNvSpPr>
             <a:spLocks noGrp="1"/>
@@ -11503,6 +12436,133 @@
       </p:graphicFrame>
       <p:sp>
         <p:nvSpPr>
+          <p:cNvPr id="4" name="Shape 1"/>
+          <p:cNvSpPr/>
+          <p:nvPr/>
+        </p:nvSpPr>
+        <p:spPr>
+          <a:xfrm>
+            <a:off x="8090738" y="91440"/>
+            <a:ext cx="3552317" cy="274320"/>
+          </a:xfrm>
+          <a:prstGeom prst="rect">
+            <a:avLst/>
+          </a:prstGeom>
+          <a:solidFill>
+            <a:srgbClr val="E0F2FE"/>
+          </a:solidFill>
+          <a:ln w="12700">
+            <a:solidFill>
+              <a:srgbClr val="0369A1"/>
+            </a:solidFill>
+            <a:prstDash val="solid"/>
+          </a:ln>
+        </p:spPr>
+      </p:sp>
+      <p:sp>
+        <p:nvSpPr>
+          <p:cNvPr id="5" name="Shape 2"/>
+          <p:cNvSpPr/>
+          <p:nvPr/>
+        </p:nvSpPr>
+        <p:spPr>
+          <a:xfrm>
+            <a:off x="8090738" y="91440"/>
+            <a:ext cx="73152" cy="274320"/>
+          </a:xfrm>
+          <a:prstGeom prst="rect">
+            <a:avLst/>
+          </a:prstGeom>
+          <a:solidFill>
+            <a:srgbClr val="0369A1"/>
+          </a:solidFill>
+          <a:ln w="12700">
+            <a:solidFill>
+              <a:srgbClr val="0369A1"/>
+            </a:solidFill>
+            <a:prstDash val="solid"/>
+          </a:ln>
+        </p:spPr>
+      </p:sp>
+      <p:pic>
+        <p:nvPicPr>
+          <p:cNvPr id="6" name="Image 0" descr="preencoded.png">    </p:cNvPr>
+          <p:cNvPicPr>
+            <a:picLocks noChangeAspect="1"/>
+          </p:cNvPicPr>
+          <p:nvPr/>
+        </p:nvPicPr>
+        <p:blipFill>
+          <a:blip r:embed="rId1"/>
+          <a:stretch>
+            <a:fillRect/>
+          </a:stretch>
+        </p:blipFill>
+        <p:spPr>
+          <a:xfrm>
+            <a:off x="8218754" y="128016"/>
+            <a:ext cx="201168" cy="201168"/>
+          </a:xfrm>
+          <a:prstGeom prst="rect">
+            <a:avLst/>
+          </a:prstGeom>
+        </p:spPr>
+      </p:pic>
+      <p:sp>
+        <p:nvSpPr>
+          <p:cNvPr id="7" name="Text 3"/>
+          <p:cNvSpPr txBox="1"/>
+          <p:nvPr/>
+        </p:nvSpPr>
+        <p:spPr>
+          <a:xfrm>
+            <a:off x="8474786" y="91440"/>
+            <a:ext cx="3131693" cy="274320"/>
+          </a:xfrm>
+          <a:prstGeom prst="rect">
+            <a:avLst/>
+          </a:prstGeom>
+          <a:noFill/>
+          <a:ln/>
+        </p:spPr>
+        <p:txBody>
+          <a:bodyPr wrap="square" lIns="0" tIns="0" rIns="0" bIns="0" rtlCol="0" anchor="ctr"/>
+          <a:lstStyle/>
+          <a:p>
+            <a:pPr indent="0" marL="0">
+              <a:buNone/>
+            </a:pPr>
+            <a:r>
+              <a:rPr lang="en-US" sz="1100" b="1" dirty="0">
+                <a:solidFill>
+                  <a:srgbClr val="075985"/>
+                </a:solidFill>
+                <a:latin typeface="Calibri" pitchFamily="34" charset="0"/>
+                <a:ea typeface="Calibri" pitchFamily="34" charset="-122"/>
+                <a:cs typeface="Calibri" pitchFamily="34" charset="-120"/>
+              </a:rPr>
+              <a:t>UNDERSTAND NOW</a:t>
+            </a:r>
+            <a:pPr indent="0" marL="0">
+              <a:buNone/>
+            </a:pPr>
+            <a:r>
+              <a:rPr lang="en-US" sz="1100" dirty="0">
+                <a:solidFill>
+                  <a:srgbClr val="075985"/>
+                </a:solidFill>
+                <a:latin typeface="Calibri" pitchFamily="34" charset="0"/>
+                <a:ea typeface="Calibri" pitchFamily="34" charset="-122"/>
+                <a:cs typeface="Calibri" pitchFamily="34" charset="-120"/>
+              </a:rPr>
+              <a:t> · packaging and publishing</a:t>
+            </a:r>
+            <a:endParaRPr lang="en-US" sz="1100" dirty="0"/>
+          </a:p>
+        </p:txBody>
+      </p:sp>
+      <p:sp>
+        <p:nvSpPr>
           <p:cNvPr id="25" name="Slide Number Placeholder 0"/>
           <p:cNvSpPr>
             <a:spLocks noGrp="1"/>
@@ -12015,6 +13075,133 @@
       </p:sp>
       <p:sp>
         <p:nvSpPr>
+          <p:cNvPr id="15" name="Shape 12"/>
+          <p:cNvSpPr/>
+          <p:nvPr/>
+        </p:nvSpPr>
+        <p:spPr>
+          <a:xfrm>
+            <a:off x="8090738" y="91440"/>
+            <a:ext cx="3552317" cy="274320"/>
+          </a:xfrm>
+          <a:prstGeom prst="rect">
+            <a:avLst/>
+          </a:prstGeom>
+          <a:solidFill>
+            <a:srgbClr val="E0F2FE"/>
+          </a:solidFill>
+          <a:ln w="12700">
+            <a:solidFill>
+              <a:srgbClr val="0369A1"/>
+            </a:solidFill>
+            <a:prstDash val="solid"/>
+          </a:ln>
+        </p:spPr>
+      </p:sp>
+      <p:sp>
+        <p:nvSpPr>
+          <p:cNvPr id="16" name="Shape 13"/>
+          <p:cNvSpPr/>
+          <p:nvPr/>
+        </p:nvSpPr>
+        <p:spPr>
+          <a:xfrm>
+            <a:off x="8090738" y="91440"/>
+            <a:ext cx="73152" cy="274320"/>
+          </a:xfrm>
+          <a:prstGeom prst="rect">
+            <a:avLst/>
+          </a:prstGeom>
+          <a:solidFill>
+            <a:srgbClr val="0369A1"/>
+          </a:solidFill>
+          <a:ln w="12700">
+            <a:solidFill>
+              <a:srgbClr val="0369A1"/>
+            </a:solidFill>
+            <a:prstDash val="solid"/>
+          </a:ln>
+        </p:spPr>
+      </p:sp>
+      <p:pic>
+        <p:nvPicPr>
+          <p:cNvPr id="17" name="Image 1" descr="preencoded.png">    </p:cNvPr>
+          <p:cNvPicPr>
+            <a:picLocks noChangeAspect="1"/>
+          </p:cNvPicPr>
+          <p:nvPr/>
+        </p:nvPicPr>
+        <p:blipFill>
+          <a:blip r:embed="rId2"/>
+          <a:stretch>
+            <a:fillRect/>
+          </a:stretch>
+        </p:blipFill>
+        <p:spPr>
+          <a:xfrm>
+            <a:off x="8218754" y="128016"/>
+            <a:ext cx="201168" cy="201168"/>
+          </a:xfrm>
+          <a:prstGeom prst="rect">
+            <a:avLst/>
+          </a:prstGeom>
+        </p:spPr>
+      </p:pic>
+      <p:sp>
+        <p:nvSpPr>
+          <p:cNvPr id="18" name="Text 14"/>
+          <p:cNvSpPr txBox="1"/>
+          <p:nvPr/>
+        </p:nvSpPr>
+        <p:spPr>
+          <a:xfrm>
+            <a:off x="8474786" y="91440"/>
+            <a:ext cx="3131693" cy="274320"/>
+          </a:xfrm>
+          <a:prstGeom prst="rect">
+            <a:avLst/>
+          </a:prstGeom>
+          <a:noFill/>
+          <a:ln/>
+        </p:spPr>
+        <p:txBody>
+          <a:bodyPr wrap="square" lIns="0" tIns="0" rIns="0" bIns="0" rtlCol="0" anchor="ctr"/>
+          <a:lstStyle/>
+          <a:p>
+            <a:pPr indent="0" marL="0">
+              <a:buNone/>
+            </a:pPr>
+            <a:r>
+              <a:rPr lang="en-US" sz="1100" b="1" dirty="0">
+                <a:solidFill>
+                  <a:srgbClr val="075985"/>
+                </a:solidFill>
+                <a:latin typeface="Calibri" pitchFamily="34" charset="0"/>
+                <a:ea typeface="Calibri" pitchFamily="34" charset="-122"/>
+                <a:cs typeface="Calibri" pitchFamily="34" charset="-120"/>
+              </a:rPr>
+              <a:t>UNDERSTAND NOW</a:t>
+            </a:r>
+            <a:pPr indent="0" marL="0">
+              <a:buNone/>
+            </a:pPr>
+            <a:r>
+              <a:rPr lang="en-US" sz="1100" dirty="0">
+                <a:solidFill>
+                  <a:srgbClr val="075985"/>
+                </a:solidFill>
+                <a:latin typeface="Calibri" pitchFamily="34" charset="0"/>
+                <a:ea typeface="Calibri" pitchFamily="34" charset="-122"/>
+                <a:cs typeface="Calibri" pitchFamily="34" charset="-120"/>
+              </a:rPr>
+              <a:t> · packaging and publishing</a:t>
+            </a:r>
+            <a:endParaRPr lang="en-US" sz="1100" dirty="0"/>
+          </a:p>
+        </p:txBody>
+      </p:sp>
+      <p:sp>
+        <p:nvSpPr>
           <p:cNvPr id="25" name="Slide Number Placeholder 0"/>
           <p:cNvSpPr>
             <a:spLocks noGrp="1"/>
@@ -12609,6 +13796,133 @@
       </p:sp>
       <p:sp>
         <p:nvSpPr>
+          <p:cNvPr id="16" name="Shape 14"/>
+          <p:cNvSpPr/>
+          <p:nvPr/>
+        </p:nvSpPr>
+        <p:spPr>
+          <a:xfrm>
+            <a:off x="8090738" y="91440"/>
+            <a:ext cx="3552317" cy="274320"/>
+          </a:xfrm>
+          <a:prstGeom prst="rect">
+            <a:avLst/>
+          </a:prstGeom>
+          <a:solidFill>
+            <a:srgbClr val="E0F2FE"/>
+          </a:solidFill>
+          <a:ln w="12700">
+            <a:solidFill>
+              <a:srgbClr val="0369A1"/>
+            </a:solidFill>
+            <a:prstDash val="solid"/>
+          </a:ln>
+        </p:spPr>
+      </p:sp>
+      <p:sp>
+        <p:nvSpPr>
+          <p:cNvPr id="17" name="Shape 15"/>
+          <p:cNvSpPr/>
+          <p:nvPr/>
+        </p:nvSpPr>
+        <p:spPr>
+          <a:xfrm>
+            <a:off x="8090738" y="91440"/>
+            <a:ext cx="73152" cy="274320"/>
+          </a:xfrm>
+          <a:prstGeom prst="rect">
+            <a:avLst/>
+          </a:prstGeom>
+          <a:solidFill>
+            <a:srgbClr val="0369A1"/>
+          </a:solidFill>
+          <a:ln w="12700">
+            <a:solidFill>
+              <a:srgbClr val="0369A1"/>
+            </a:solidFill>
+            <a:prstDash val="solid"/>
+          </a:ln>
+        </p:spPr>
+      </p:sp>
+      <p:pic>
+        <p:nvPicPr>
+          <p:cNvPr id="18" name="Image 0" descr="preencoded.png">    </p:cNvPr>
+          <p:cNvPicPr>
+            <a:picLocks noChangeAspect="1"/>
+          </p:cNvPicPr>
+          <p:nvPr/>
+        </p:nvPicPr>
+        <p:blipFill>
+          <a:blip r:embed="rId1"/>
+          <a:stretch>
+            <a:fillRect/>
+          </a:stretch>
+        </p:blipFill>
+        <p:spPr>
+          <a:xfrm>
+            <a:off x="8218754" y="128016"/>
+            <a:ext cx="201168" cy="201168"/>
+          </a:xfrm>
+          <a:prstGeom prst="rect">
+            <a:avLst/>
+          </a:prstGeom>
+        </p:spPr>
+      </p:pic>
+      <p:sp>
+        <p:nvSpPr>
+          <p:cNvPr id="19" name="Text 16"/>
+          <p:cNvSpPr txBox="1"/>
+          <p:nvPr/>
+        </p:nvSpPr>
+        <p:spPr>
+          <a:xfrm>
+            <a:off x="8474786" y="91440"/>
+            <a:ext cx="3131693" cy="274320"/>
+          </a:xfrm>
+          <a:prstGeom prst="rect">
+            <a:avLst/>
+          </a:prstGeom>
+          <a:noFill/>
+          <a:ln/>
+        </p:spPr>
+        <p:txBody>
+          <a:bodyPr wrap="square" lIns="0" tIns="0" rIns="0" bIns="0" rtlCol="0" anchor="ctr"/>
+          <a:lstStyle/>
+          <a:p>
+            <a:pPr indent="0" marL="0">
+              <a:buNone/>
+            </a:pPr>
+            <a:r>
+              <a:rPr lang="en-US" sz="1100" b="1" dirty="0">
+                <a:solidFill>
+                  <a:srgbClr val="075985"/>
+                </a:solidFill>
+                <a:latin typeface="Calibri" pitchFamily="34" charset="0"/>
+                <a:ea typeface="Calibri" pitchFamily="34" charset="-122"/>
+                <a:cs typeface="Calibri" pitchFamily="34" charset="-120"/>
+              </a:rPr>
+              <a:t>UNDERSTAND NOW</a:t>
+            </a:r>
+            <a:pPr indent="0" marL="0">
+              <a:buNone/>
+            </a:pPr>
+            <a:r>
+              <a:rPr lang="en-US" sz="1100" dirty="0">
+                <a:solidFill>
+                  <a:srgbClr val="075985"/>
+                </a:solidFill>
+                <a:latin typeface="Calibri" pitchFamily="34" charset="0"/>
+                <a:ea typeface="Calibri" pitchFamily="34" charset="-122"/>
+                <a:cs typeface="Calibri" pitchFamily="34" charset="-120"/>
+              </a:rPr>
+              <a:t> · packaging and publishing</a:t>
+            </a:r>
+            <a:endParaRPr lang="en-US" sz="1100" dirty="0"/>
+          </a:p>
+        </p:txBody>
+      </p:sp>
+      <p:sp>
+        <p:nvSpPr>
           <p:cNvPr id="25" name="Slide Number Placeholder 0"/>
           <p:cNvSpPr>
             <a:spLocks noGrp="1"/>
@@ -13401,6 +14715,133 @@
               <a:t>Fix it, raise the version to 1.0.1, pack and submit again: 1.0.0 stays as it was</a:t>
             </a:r>
             <a:endParaRPr lang="en-US" sz="1900" dirty="0"/>
+          </a:p>
+        </p:txBody>
+      </p:sp>
+      <p:sp>
+        <p:nvSpPr>
+          <p:cNvPr id="22" name="Shape 20"/>
+          <p:cNvSpPr/>
+          <p:nvPr/>
+        </p:nvSpPr>
+        <p:spPr>
+          <a:xfrm>
+            <a:off x="8090738" y="91440"/>
+            <a:ext cx="3552317" cy="274320"/>
+          </a:xfrm>
+          <a:prstGeom prst="rect">
+            <a:avLst/>
+          </a:prstGeom>
+          <a:solidFill>
+            <a:srgbClr val="E0F2FE"/>
+          </a:solidFill>
+          <a:ln w="12700">
+            <a:solidFill>
+              <a:srgbClr val="0369A1"/>
+            </a:solidFill>
+            <a:prstDash val="solid"/>
+          </a:ln>
+        </p:spPr>
+      </p:sp>
+      <p:sp>
+        <p:nvSpPr>
+          <p:cNvPr id="23" name="Shape 21"/>
+          <p:cNvSpPr/>
+          <p:nvPr/>
+        </p:nvSpPr>
+        <p:spPr>
+          <a:xfrm>
+            <a:off x="8090738" y="91440"/>
+            <a:ext cx="73152" cy="274320"/>
+          </a:xfrm>
+          <a:prstGeom prst="rect">
+            <a:avLst/>
+          </a:prstGeom>
+          <a:solidFill>
+            <a:srgbClr val="0369A1"/>
+          </a:solidFill>
+          <a:ln w="12700">
+            <a:solidFill>
+              <a:srgbClr val="0369A1"/>
+            </a:solidFill>
+            <a:prstDash val="solid"/>
+          </a:ln>
+        </p:spPr>
+      </p:sp>
+      <p:pic>
+        <p:nvPicPr>
+          <p:cNvPr id="24" name="Image 0" descr="preencoded.png">    </p:cNvPr>
+          <p:cNvPicPr>
+            <a:picLocks noChangeAspect="1"/>
+          </p:cNvPicPr>
+          <p:nvPr/>
+        </p:nvPicPr>
+        <p:blipFill>
+          <a:blip r:embed="rId1"/>
+          <a:stretch>
+            <a:fillRect/>
+          </a:stretch>
+        </p:blipFill>
+        <p:spPr>
+          <a:xfrm>
+            <a:off x="8218754" y="128016"/>
+            <a:ext cx="201168" cy="201168"/>
+          </a:xfrm>
+          <a:prstGeom prst="rect">
+            <a:avLst/>
+          </a:prstGeom>
+        </p:spPr>
+      </p:pic>
+      <p:sp>
+        <p:nvSpPr>
+          <p:cNvPr id="25" name="Text 22"/>
+          <p:cNvSpPr txBox="1"/>
+          <p:nvPr/>
+        </p:nvSpPr>
+        <p:spPr>
+          <a:xfrm>
+            <a:off x="8474786" y="91440"/>
+            <a:ext cx="3131693" cy="274320"/>
+          </a:xfrm>
+          <a:prstGeom prst="rect">
+            <a:avLst/>
+          </a:prstGeom>
+          <a:noFill/>
+          <a:ln/>
+        </p:spPr>
+        <p:txBody>
+          <a:bodyPr wrap="square" lIns="0" tIns="0" rIns="0" bIns="0" rtlCol="0" anchor="ctr"/>
+          <a:lstStyle/>
+          <a:p>
+            <a:pPr indent="0" marL="0">
+              <a:buNone/>
+            </a:pPr>
+            <a:r>
+              <a:rPr lang="en-US" sz="1100" b="1" dirty="0">
+                <a:solidFill>
+                  <a:srgbClr val="075985"/>
+                </a:solidFill>
+                <a:latin typeface="Calibri" pitchFamily="34" charset="0"/>
+                <a:ea typeface="Calibri" pitchFamily="34" charset="-122"/>
+                <a:cs typeface="Calibri" pitchFamily="34" charset="-120"/>
+              </a:rPr>
+              <a:t>UNDERSTAND NOW</a:t>
+            </a:r>
+            <a:pPr indent="0" marL="0">
+              <a:buNone/>
+            </a:pPr>
+            <a:r>
+              <a:rPr lang="en-US" sz="1100" dirty="0">
+                <a:solidFill>
+                  <a:srgbClr val="075985"/>
+                </a:solidFill>
+                <a:latin typeface="Calibri" pitchFamily="34" charset="0"/>
+                <a:ea typeface="Calibri" pitchFamily="34" charset="-122"/>
+                <a:cs typeface="Calibri" pitchFamily="34" charset="-120"/>
+              </a:rPr>
+              <a:t> · packaging and publishing</a:t>
+            </a:r>
+            <a:endParaRPr lang="en-US" sz="1100" dirty="0"/>
           </a:p>
         </p:txBody>
       </p:sp>

--- a/en/slides/23-Computer_Architecture-Verm1_On_The_Cartridge_Store.pptx
+++ b/en/slides/23-Computer_Architecture-Verm1_On_The_Cartridge_Store.pptx
@@ -119,7 +119,7 @@
   <p:extLst>
     <p:ext uri="{521415D9-36F7-43E2-AB2F-B90AF26B5E84}">
       <p14:sectionLst xmlns:p14="http://schemas.microsoft.com/office/powerpoint/2010/main">
-        <p14:section name="Opening" id="{ca79fe9d-5e9f-a8c3-2648-2965c33411ba}">
+        <p14:section name="Opening" id="{6e45a11b-b93b-1b6d-2426-83d9d55d646f}">
           <p14:sldIdLst>
             <p14:sldId id="256"/>
             <p14:sldId id="257"/>
@@ -128,14 +128,14 @@
             <p14:sldId id="260"/>
           </p14:sldIdLst>
         </p14:section>
-        <p14:section name="Step 2: an identity" id="{6500cc6b-8eb4-e088-3425-2673164a9d3c}">
+        <p14:section name="Step 2: an identity" id="{8daf8241-8cad-8007-ece1-a6e324cc27c8}">
           <p14:sldIdLst>
             <p14:sldId id="261"/>
             <p14:sldId id="262"/>
             <p14:sldId id="263"/>
           </p14:sldIdLst>
         </p14:section>
-        <p14:section name="Step 5: publication" id="{364da4fa-7679-e154-1be3-ffca880b8895}">
+        <p14:section name="Step 5: publication" id="{a00314e3-e02b-212b-ee63-38c3973d66c0}">
           <p14:sldIdLst>
             <p14:sldId id="264"/>
             <p14:sldId id="265"/>

--- a/en/slides/23-Computer_Architecture-Verm1_On_The_Cartridge_Store.pptx
+++ b/en/slides/23-Computer_Architecture-Verm1_On_The_Cartridge_Store.pptx
@@ -119,7 +119,7 @@
   <p:extLst>
     <p:ext uri="{521415D9-36F7-43E2-AB2F-B90AF26B5E84}">
       <p14:sectionLst xmlns:p14="http://schemas.microsoft.com/office/powerpoint/2010/main">
-        <p14:section name="Opening" id="{6e45a11b-b93b-1b6d-2426-83d9d55d646f}">
+        <p14:section name="Opening" id="{eec98c09-42a2-5cd2-0a87-655aa0b0d639}">
           <p14:sldIdLst>
             <p14:sldId id="256"/>
             <p14:sldId id="257"/>
@@ -128,14 +128,14 @@
             <p14:sldId id="260"/>
           </p14:sldIdLst>
         </p14:section>
-        <p14:section name="Step 2: an identity" id="{8daf8241-8cad-8007-ece1-a6e324cc27c8}">
+        <p14:section name="Step 2: an identity" id="{79cfb993-bb92-e17f-fdb8-9ea2523e8224}">
           <p14:sldIdLst>
             <p14:sldId id="261"/>
             <p14:sldId id="262"/>
             <p14:sldId id="263"/>
           </p14:sldIdLst>
         </p14:section>
-        <p14:section name="Step 5: publication" id="{a00314e3-e02b-212b-ee63-38c3973d66c0}">
+        <p14:section name="Step 5: publication" id="{6a2e3513-7c96-cb14-3e21-50902222821e}">
           <p14:sldIdLst>
             <p14:sldId id="264"/>
             <p14:sldId id="265"/>
@@ -548,7 +548,7 @@
           <a:p>
             <a:r>
               <a:rPr lang="en-US" dirty="0"/>
-              <a:t>The project ends today, with the step that turns a program into a product. Your Verm1 runs on your desk; at the end of this lecture it will be a single file that anyone can install, on the kit, on QEMU or on PRG32-QT, with a name, an icon and your signature. The quotation, from the team that built the first Macintosh, says that a work is finished only when it has been delivered.
+              <a:t>The project ends today with the step that turns a program into a product. The student's Verm1 runs on their own desk; by the end of this lecture it will be a single file that anyone can install, on the kit, on QEMU or on PRG32-QT, bearing a name, an icon and its author's signature. The epigraph, from the team that built the first Macintosh, holds that a work is finished only when it has been delivered. The lecture treats delivery as an engineering discipline with its own concepts: identity, versioning, licensing and responsibility.
 Learning status: UNDERSTAND NOW, by the end of this lecture you explain it, trace it and apply it on your own; USE NOW, you follow and use the recipe today; how it works inside is explained later, or is not part of the course; UNDERSTAND LATER, recognise the name and what it is for; a later lecture explains it. A slide without a badge is context: a story, an example, a question, an exercise.
 Learning status of this lecture. UNDERSTAND NOW: packaging and publishing; the portable cartridge. USE NOW: the PRG32 tools (used, not studied, in this course). UNDERSTAND LATER: nothing. A slide without a badge is context: a story, an example, a question, an exercise.
 For the lecturer: Last lecture of the project; Lecture 24 closes the course with an outlook. A tutorial again: at the end every student has a bundle, verm1-1.0.0.zip, checked and ready for submission. Uploading is a personal act with a personal token: do it in the laboratory only with students who want to. Everything up to the upload is run by tools/tests/verm1_store.py on the reference game.</a:t>
@@ -639,7 +639,7 @@
           <a:p>
             <a:r>
               <a:rPr lang="en-US" dirty="0"/>
-              <a:t>The submission checklist, seven points: played to the end on every architecture; abi-table for every file; id unique and yours, version new, honest descriptions; authors, licence and colophon complete; the right metadata inside each cartridge; the bundle tested on another computer; the token in no file. A checklist is not bureaucracy: it is the instrument with which experts avoid the mistakes of experts.
+              <a:t>The submission checklist, seven points: played to completion on every architecture; abi-table present in every file; identifier unique and the author's own, version new, descriptions honest; authors, licence and colophon complete; the correct metadata inside each cartridge; the bundle tested on another computer; the token in no file. A checklist is not bureaucracy: it is the instrument by which experts avoid the errors that experts make, a practice borrowed from aviation and surgery.
 UNDERSTAND NOW: packaging and publishing.
 For the lecturer: Print it. A checklist is not bureaucracy: it is how pilots and surgeons avoid the mistakes that experts make.</a:t>
             </a:r>
@@ -729,8 +729,8 @@
           <a:p>
             <a:r>
               <a:rPr lang="en-US" dirty="0"/>
-              <a:t>Remember the rule about versions: what has been published is treated as permanent.
-Think of where the metadata ends up: inside one cartridge file. How many architectures does one cartridge file have?
+              <a:t>For the first question, the rule concerning versions applies: what has been published is treated as permanent.
+For the second, one considers where the metadata ends up, inside a single cartridge file, and how many architectures one cartridge file serves.
 For the lecturer: 1. Answer: B. A published version is treated as permanent: a correction is a new version with the same id.
 2. Answer: B. The list of files belongs to the bundle; a single cartridge states its own architecture, given on the command line.</a:t>
             </a:r>
@@ -820,7 +820,7 @@
           <a:p>
             <a:r>
               <a:rPr lang="en-US" dirty="0"/>
-              <a:t>A token is a credential, like a password. Which of the four places is not a file that gets shared?
+              <a:t>A token is a credential, comparable to a password. The question is which of the four locations is not a file that is ever shared.
 For the lecturer: Answer: C. A token is a credential: it never goes into a file that is shared or versioned.</a:t>
             </a:r>
             <a:endParaRPr lang="en-US" dirty="0"/>
@@ -909,7 +909,7 @@
           <a:p>
             <a:r>
               <a:rPr lang="en-US" dirty="0"/>
-              <a:t>What you built in this course. A game of six hundred lines of assembly, grown from three functions that only returned. With it, every layer of the machine: bits and numbers, gates and tables, state and memory, the processor, the screen, the devices. A method: one runnable step at a time, and a look inside whenever something surprises you. And the last step, which makes it engineering: a product with a name, a version and an author. The next lecture looks beyond the kit.
+              <a:t>What the student has built in this course. A game of about six hundred lines of assembly, grown from three functions that merely returned, and with it a working knowledge of every layer of the machine: bits and numbers, gates and tables, state and memory, the processor, the display and the devices. A method: one runnable step at a time, and an inspection of the machine whenever something is surprising. And the final step that makes the work engineering: a product with a name, a version and an author. The next lecture looks beyond the kit.
 Learning status, recap. UNDERSTAND NOW: packaging and publishing; the portable cartridge. USE NOW: the PRG32 tools (used, not studied, in this course). UNDERSTAND LATER: nothing. A slide without a badge is context: a story, an example, a question, an exercise.
 For the lecturer: The project ends here; Lecture 24 looks beyond the kit, to the machines that run the same instructions at scale. The project deliverables are the source of the student's variant and its bundle; the oral examination can start from any line of it.</a:t>
             </a:r>
@@ -999,7 +999,7 @@
           <a:p>
             <a:r>
               <a:rPr lang="en-US" dirty="0"/>
-              <a:t>Five results. Your game built for two architectures from the same source. A manifest that gives it an identity: id, title, version, authors, licence. An icon and a colophon with credits and controls. A bundle, a single ZIP file, checked and ready for the Cartridge Store. And a clear idea of what happens after publication, and of what you answer for.</a:t>
+              <a:t>Five outcomes. The game built for two architectures from a single source. A manifest that gives it an identity: identifier, title, version, authors and licence. An icon and a colophon with credits and controls. A bundle, a single ZIP file, verified and ready for the Cartridge Store. And a clear understanding of what follows publication, and of what the author is answerable for.</a:t>
             </a:r>
             <a:endParaRPr lang="en-US" dirty="0"/>
           </a:p>
@@ -1087,7 +1087,7 @@
           <a:p>
             <a:r>
               <a:rPr lang="en-US" dirty="0"/>
-              <a:t>Why publish? A program that runs only on its author's computer is an exercise; one that others can install is a product. Publishing forces you to answer questions that an exercise lets you skip: what is it called, who made it, on what does it run, what may others do with it. The Cartridge Store is the shelf of PRG32, and every cartridge on it was written by someone who began where you began.
+              <a:t>Why publish? A program that runs only on its author's computer is an exercise; one that others can install is a product. Publication compels answers to questions an exercise allows one to evade: what the program is called, who made it, on what it runs, and what others may do with it. The Cartridge Store is the shelf of PRG32, and every cartridge on it was written by someone who began where the student began.
 UNDERSTAND NOW: packaging and publishing.
 For the lecturer: The Store is at store.prg32.uniparthenope.it; its software is open, github.com/riscv-prg32/CartridgeStore. PRG32-QT has a Store browser of its own. Show both.</a:t>
             </a:r>
@@ -1177,7 +1177,7 @@
           <a:p>
             <a:r>
               <a:rPr lang="en-US" dirty="0"/>
-              <a:t>The path from source to shelf in six stages: your source file; two cartridges, one per architecture; the metadata, that is identity, icon and credits; the bundle; the review by an editor; the Store. The first four of today's steps happen entirely on your computer. Only the fifth talks to the Store: until then nothing leaves your machine.
+              <a:t>The path from source to shelf in six stages: the source file; two cartridges, one per architecture; the metadata, comprising identity, icon and credits; the bundle; review by an editor; and the Store. The first four of today's steps take place entirely on the student's own computer. Only the fifth communicates with the Store, so that until then nothing leaves the machine.
 UNDERSTAND NOW: packaging and publishing.
 For the lecturer: The flow of the lecture. Nothing leaves the student's computer before the publish command.</a:t>
             </a:r>
@@ -1267,7 +1267,7 @@
           <a:p>
             <a:r>
               <a:rPr lang="en-US" dirty="0"/>
-              <a:t>Before packaging, ask whether the game is finished. Six checks, each with a method and an instrument. It starts, plays and ends: play three whole games. No frame is late: watch the telemetry. Memory is consistent: pause at random and compare ring, map and screen. It runs on the second architecture, QEMU, and on the real kit if you have one. And it is yours: it has something the reference does not have. A cartridge never run on a target should not be published for that target.
+              <a:t>Before packaging, one must establish whether the game is finished. Six checks, each with a method and an instrument. It starts, plays and ends: three complete games are played. No frame is late: the telemetry is observed. Memory is consistent: execution is paused at random and ring, map and screen compared, the invariant of Part 3. It runs on the second architecture, QEMU, and on the physical kit if one is available. And it is the author's own: it contains something the reference does not. A cartridge never run on a target should not be published for that target.
 UNDERSTAND NOW: packaging and publishing.
 For the lecturer: The debugger is used one last time, as a quality instrument. A cartridge that was never run on a target should not be published for that target.</a:t>
             </a:r>
@@ -1357,7 +1357,7 @@
           <a:p>
             <a:r>
               <a:rPr lang="en-US" dirty="0"/>
-              <a:t>Each field commits you to something. The id is by custom a reverse domain name, and never changes: put your own name in it, because two students cannot publish the same one. The version follows the scheme major, minor, patch, and a published version is treated as permanent: a mistake is corrected with a new version. The authors are all those who wrote the game. The license says what others may do with it. The tags are how it will be found.
+              <a:t>Each field of the manifest is a commitment. The id is conventionally a reverse domain name and never changes; it should contain the author's own name, since two students cannot publish the same identifier. The version follows the scheme major, minor, patch, and a published version is treated as immutable: an error is corrected by a new version. The authors are all who wrote the game. The license states what others may do with it. The tags determine how it will be found.
 UNDERSTAND NOW: packaging and publishing.
 For the lecturer: Two students cannot publish the same id: each uses an id of their own, for example it.uniparthenope.arc12.&lt;surname&gt;.verm1. Agree on the convention in class. Treat an id and a version, once published, as permanent: a mistake is corrected by a new version, not by a replacement. It is a rule of practice (semantic versioning), which the players who already installed 1.0.0 rely on.</a:t>
             </a:r>
@@ -1447,7 +1447,7 @@
           <a:p>
             <a:r>
               <a:rPr lang="en-US" dirty="0"/>
-              <a:t>The icon is a small PNG image that represents the game on the shelf. The reference one is 64 by 64 pixels: a worm and a piece of food in the colours of the game. Pixel art suits a machine of this resolution: draw large, cell by cell, with any editor that saves PNG. Save it as icon.png next to the manifest. And draw it yourself: an image taken from the web is somebody else's work.
+              <a:t>The icon is a small PNG image representing the game on the shelf. The reference icon is 64 by 64 pixels: a worm and a piece of food in the colours of the game. Pixel art suits a machine of this resolution; it is best drawn large, cell by cell, with any editor that saves PNG, and saved as icon.png beside the manifest. It should be drawn by the author: an image taken from the web is someone else's work.
 UNDERSTAND NOW: packaging and publishing.
 For the lecturer: The reference icon is verm1/store/icon.png. An icon taken from the web is somebody else's work: draw your own.</a:t>
             </a:r>
@@ -1537,7 +1537,7 @@
           <a:p>
             <a:r>
               <a:rPr lang="en-US" dirty="0"/>
-              <a:t>A tribute is not a copy. Verm1 is a tribute to Snake: the idea of a worm that grows is as old as Blockade, of 1976, and belongs to everyone. The name, the code, the icon and the sounds are ours. The rules of a game are not protected; code, pictures, music and names are. So before publishing, ask of every piece: did I make it myself? If not, does its licence allow me to publish it, and did I give credit? Your name goes on it: publish only what you would sign.
+              <a:t>A tribute is not a copy. Verm1 is a tribute to Snake: the idea of a growing worm is as old as Blockade, of 1976, and belongs to everyone, while the name, the code, the icon and the sounds are original. The rules of a game are not protected; code, images, music and names are. Before publication each component should therefore be examined: was it made by the author? If not, does its licence permit publication, and has credit been given? The author's name appears on the work, so only what the author would sign should be published.
 UNDERSTAND NOW: packaging and publishing.
 For the lecturer: Game rules are not protected; code, pictures, music and names are. A short and concrete introduction to authorship, which engineers meet early.</a:t>
             </a:r>
@@ -1627,7 +1627,7 @@
           <a:p>
             <a:r>
               <a:rPr lang="en-US" dirty="0"/>
-              <a:t>What happens next, in four stages. Pending: the bundle is kept as a submission, and is not yet on the shelf. Review: an editor checks that it installs, runs, is described honestly and contains nothing that is not yours. Published: the game appears in the Store for the architectures you declared. And if you find a bug: correct it, raise the version to 1.0.1, pack and submit again; version 1.0.0 remains as it was.
+              <a:t>What follows, in four stages. Pending: the bundle is held as a submission and is not yet on the shelf. Review: an editor verifies that it installs, runs, is described honestly and contains nothing that is not the author's. Published: the game appears in the Store for the declared architectures. And should an error be found, it is corrected, the version raised to 1.0.1, and the bundle packed and submitted again, while version 1.0.0 remains as it was.
 UNDERSTAND NOW: packaging and publishing.
 For the lecturer: Moderation protects the players and the authors. A rejection comes with a reason: answer it with a new version.</a:t>
             </a:r>
@@ -2746,7 +2746,7 @@
                 <a:ea typeface="Calibri" pitchFamily="34" charset="-122"/>
                 <a:cs typeface="Calibri" pitchFamily="34" charset="-120"/>
               </a:rPr>
-              <a:t>23-Computer_Architecture-Verm1_On_The_Cartridge_Store-Code.pptx</a:t>
+              <a:t>23-Computer_Architecture-Verm1_On_The_Cartridge_Store-Lab.pptx</a:t>
             </a:r>
             <a:endParaRPr lang="en-US" sz="1300" dirty="0"/>
           </a:p>

--- a/en/slides/23-Computer_Architecture-Verm1_On_The_Cartridge_Store.pptx
+++ b/en/slides/23-Computer_Architecture-Verm1_On_The_Cartridge_Store.pptx
@@ -119,7 +119,7 @@
   <p:extLst>
     <p:ext uri="{521415D9-36F7-43E2-AB2F-B90AF26B5E84}">
       <p14:sectionLst xmlns:p14="http://schemas.microsoft.com/office/powerpoint/2010/main">
-        <p14:section name="Opening" id="{eec98c09-42a2-5cd2-0a87-655aa0b0d639}">
+        <p14:section name="Opening" id="{32901430-7857-4692-8411-9710576a13c0}">
           <p14:sldIdLst>
             <p14:sldId id="256"/>
             <p14:sldId id="257"/>
@@ -128,14 +128,14 @@
             <p14:sldId id="260"/>
           </p14:sldIdLst>
         </p14:section>
-        <p14:section name="Step 2: an identity" id="{79cfb993-bb92-e17f-fdb8-9ea2523e8224}">
+        <p14:section name="Step 2: an identity" id="{b8aafeca-3186-d84b-73ca-8e8f1b434f6a}">
           <p14:sldIdLst>
             <p14:sldId id="261"/>
             <p14:sldId id="262"/>
             <p14:sldId id="263"/>
           </p14:sldIdLst>
         </p14:section>
-        <p14:section name="Step 5: publication" id="{6a2e3513-7c96-cb14-3e21-50902222821e}">
+        <p14:section name="Step 5: publication" id="{8fa18be0-463c-08aa-1151-a6d0d3451404}">
           <p14:sldIdLst>
             <p14:sldId id="264"/>
             <p14:sldId id="265"/>

--- a/en/slides/23-Computer_Architecture-Verm1_On_The_Cartridge_Store.pptx
+++ b/en/slides/23-Computer_Architecture-Verm1_On_The_Cartridge_Store.pptx
@@ -119,7 +119,7 @@
   <p:extLst>
     <p:ext uri="{521415D9-36F7-43E2-AB2F-B90AF26B5E84}">
       <p14:sectionLst xmlns:p14="http://schemas.microsoft.com/office/powerpoint/2010/main">
-        <p14:section name="Opening" id="{32901430-7857-4692-8411-9710576a13c0}">
+        <p14:section name="Opening" id="{07a2d186-2db4-6d67-5b3c-225f9aae8d94}">
           <p14:sldIdLst>
             <p14:sldId id="256"/>
             <p14:sldId id="257"/>
@@ -128,14 +128,14 @@
             <p14:sldId id="260"/>
           </p14:sldIdLst>
         </p14:section>
-        <p14:section name="Step 2: an identity" id="{b8aafeca-3186-d84b-73ca-8e8f1b434f6a}">
+        <p14:section name="Step 2: an identity" id="{a5c0418f-bc6a-2ae8-1634-049de5e9e68b}">
           <p14:sldIdLst>
             <p14:sldId id="261"/>
             <p14:sldId id="262"/>
             <p14:sldId id="263"/>
           </p14:sldIdLst>
         </p14:section>
-        <p14:section name="Step 5: publication" id="{8fa18be0-463c-08aa-1151-a6d0d3451404}">
+        <p14:section name="Step 5: publication" id="{d24e0770-7f3c-7557-9be3-2adf314d0661}">
           <p14:sldIdLst>
             <p14:sldId id="264"/>
             <p14:sldId id="265"/>
@@ -551,6 +551,7 @@
               <a:t>The project ends today with the step that turns a program into a product. The student's Verm1 runs on their own desk; by the end of this lecture it will be a single file that anyone can install, on the kit, on QEMU or on PRG32-QT, bearing a name, an icon and its author's signature. The epigraph, from the team that built the first Macintosh, holds that a work is finished only when it has been delivered. The lecture treats delivery as an engineering discipline with its own concepts: identity, versioning, licensing and responsibility.
 Learning status: UNDERSTAND NOW, by the end of this lecture you explain it, trace it and apply it on your own; USE NOW, you follow and use the recipe today; how it works inside is explained later, or is not part of the course; UNDERSTAND LATER, recognise the name and what it is for; a later lecture explains it. A slide without a badge is context: a story, an example, a question, an exercise.
 Learning status of this lecture. UNDERSTAND NOW: packaging and publishing; the portable cartridge. USE NOW: the PRG32 tools (used, not studied, in this course). UNDERSTAND LATER: nothing. A slide without a badge is context: a story, an example, a question, an exercise.
+Roadmap. Today's outcomes: (1) build portable cartridges and check them; (2) package a bundle with metadata and publish it safely. Builds on: only what Lecture 01 set up. Next: Lecture 24, Beyond One Core: Superscalar RISC-V, HPC, GPUs and FPGAs.
 For the lecturer: Last lecture of the project; Lecture 24 closes the course with an outlook. A tutorial again: at the end every student has a bundle, verm1-1.0.0.zip, checked and ready for submission. Uploading is a personal act with a personal token: do it in the laboratory only with students who want to. Everything up to the upload is run by tools/tests/verm1_store.py on the reference game.</a:t>
             </a:r>
             <a:endParaRPr lang="en-US" dirty="0"/>
@@ -910,7 +911,7 @@
             <a:r>
               <a:rPr lang="en-US" dirty="0"/>
               <a:t>What the student has built in this course. A game of about six hundred lines of assembly, grown from three functions that merely returned, and with it a working knowledge of every layer of the machine: bits and numbers, gates and tables, state and memory, the processor, the display and the devices. A method: one runnable step at a time, and an inspection of the machine whenever something is surprising. And the final step that makes the work engineering: a product with a name, a version and an author. The next lecture looks beyond the kit.
-Learning status, recap. UNDERSTAND NOW: packaging and publishing; the portable cartridge. USE NOW: the PRG32 tools (used, not studied, in this course). UNDERSTAND LATER: nothing. A slide without a badge is context: a story, an example, a question, an exercise.
+Learning status, recap. UNDERSTAND NOW: packaging and publishing; the portable cartridge. USE NOW: the PRG32 tools (used, not studied, in this course). UNDERSTAND LATER: nothing. A slide without a badge is context: a story, an example, a question, an exercise. Closing thread: A game is finished when someone else can run it: a portable cartridge, honest metadata, a bundle tested on another computer and a token kept secret. Next: machines faster than one core. Exit ticket (two to four minutes, alone, on paper): 1. cartridge summary prints import_model: abi-table. What does this say about the cartridge, and why does the Store accept only such cartridges? 2. You published version 1.0.0 and found a bug. What do you publish now? Where must the Store token never appear?
 For the lecturer: The project ends here; Lecture 24 looks beyond the kit, to the machines that run the same instructions at scale. The project deliverables are the source of the student's variant and its bundle; the oral examination can start from any line of it.</a:t>
             </a:r>
             <a:endParaRPr lang="en-US" dirty="0"/>
